--- a/public/retrieval-retrieval-placemat-template.pptx
+++ b/public/retrieval-retrieval-placemat-template.pptx
@@ -2,13 +2,13 @@
 <file path=ppt/presentation.xml><?xml version="1.0" encoding="utf-8"?>
 <p:presentation xmlns:p="http://schemas.openxmlformats.org/presentationml/2006/main">
   <p:sldMasterIdLst>
-    <p:sldMasterId xmlns:r="http://schemas.openxmlformats.org/officeDocument/2006/relationships" id="2147483648" r:id="R0232dd51dcdf4bb3"/>
+    <p:sldMasterId xmlns:r="http://schemas.openxmlformats.org/officeDocument/2006/relationships" id="2147483648" r:id="Rc47dc020a5874c23"/>
   </p:sldMasterIdLst>
   <p:notesMasterIdLst>
-    <p:notesMasterId xmlns:r="http://schemas.openxmlformats.org/officeDocument/2006/relationships" r:id="Rf6d88eeb61444168"/>
+    <p:notesMasterId xmlns:r="http://schemas.openxmlformats.org/officeDocument/2006/relationships" r:id="R569ef866824a4006"/>
   </p:notesMasterIdLst>
   <p:sldIdLst>
-    <p:sldId xmlns:r="http://schemas.openxmlformats.org/officeDocument/2006/relationships" id="256" r:id="R19a540785ae54cf3"/>
+    <p:sldId xmlns:r="http://schemas.openxmlformats.org/officeDocument/2006/relationships" id="256" r:id="R961583bc8ad74ab1"/>
   </p:sldIdLst>
   <p:sldSz cx="12192000" cy="6858000"/>
   <p:notesSz cx="6858000" cy="9144000"/>
@@ -442,7 +442,7 @@
           <a:lstStyle xmlns:a="http://schemas.openxmlformats.org/drawingml/2006/main"/>
           <a:p xmlns:a="http://schemas.openxmlformats.org/drawingml/2006/main">
             <a:r>
-              <a:t>Teacher setup: Replace bracketed text before teaching. Every text box is editable. Duplicate the slide for checked answers or a second prompt. Keep prompt and answer sides separate when printing cards.</a:t>
+              <a:t>Teacher setup: Replace bracketed text before teaching. All text and shapes are editable. Duplicate the slide for answers or another prompt. For card activities, separate prompt and answer sides before printing.</a:t>
             </a:r>
           </a:p>
           <a:p xmlns:a="http://schemas.openxmlformats.org/drawingml/2006/main">
@@ -452,17 +452,12 @@
           </a:p>
           <a:p xmlns:a="http://schemas.openxmlformats.org/drawingml/2006/main">
             <a:r>
-              <a:t>Activity: Retrieval placemat</a:t>
-            </a:r>
-          </a:p>
-          <a:p xmlns:a="http://schemas.openxmlformats.org/drawingml/2006/main">
-            <a:r>
               <a:t>Materials: Paper divided into individual spaces and a centre</a:t>
             </a:r>
           </a:p>
           <a:p xmlns:a="http://schemas.openxmlformats.org/drawingml/2006/main">
             <a:r>
-              <a:t>Suggested total time including feedback: 10 minutes.</a:t>
+              <a:t>Suggested time including feedback: 10 minutes.</a:t>
             </a:r>
           </a:p>
           <a:p xmlns:a="http://schemas.openxmlformats.org/drawingml/2006/main">
@@ -505,26 +500,6 @@
               <a:t>Adapt: Use pairs or separate sheets if shared paper is awkward; assign speaking turns.</a:t>
             </a:r>
           </a:p>
-          <a:p xmlns:a="http://schemas.openxmlformats.org/drawingml/2006/main">
-            <a:r>
-              <a:t>Credit: Shared placemat structure; TNT retrieval adaptation</a:t>
-            </a:r>
-          </a:p>
-          <a:p xmlns:a="http://schemas.openxmlformats.org/drawingml/2006/main">
-            <a:r>
-              <a:t>Placemat is a widely used cooperative structure. No sole originator is verified here; this guide adds an individual memory-first stage.</a:t>
-            </a:r>
-          </a:p>
-          <a:p xmlns:a="http://schemas.openxmlformats.org/drawingml/2006/main">
-            <a:r>
-              <a:t>Source: https://pdf.retrievalpractice.org/RetrievalPracticeGuide.pdf</a:t>
-            </a:r>
-          </a:p>
-          <a:p xmlns:a="http://schemas.openxmlformats.org/drawingml/2006/main">
-            <a:r>
-              <a:t>Full guide: https://tnt-teaching-tools.github.io/cold-call-classroom/retrieval-retrieval-placemat.html</a:t>
-            </a:r>
-          </a:p>
         </p:txBody>
       </p:sp>
       <p:sp>
@@ -569,7 +544,7 @@
           <p:cNvPr id="4" name="Accent rule">
             <a:extLst xmlns:a="http://schemas.openxmlformats.org/drawingml/2006/main">
               <a:ext uri="{FF2B5EF4-FFF2-40B4-BE49-F238E27FC236}">
-                <a16:creationId xmlns:a16="http://schemas.microsoft.com/office/drawing/2014/main" id="{706E57DD-42AB-4582-A9B3-26BA8174E109}"/>
+                <a16:creationId xmlns:a16="http://schemas.microsoft.com/office/drawing/2014/main" id="{16C14724-E230-4E54-8467-C88512889B79}"/>
               </a:ext>
             </a:extLst>
           </p:cNvPr>
@@ -600,7 +575,7 @@
           <p:cNvPr id="2" name="Title">
             <a:extLst xmlns:a="http://schemas.openxmlformats.org/drawingml/2006/main">
               <a:ext uri="{FF2B5EF4-FFF2-40B4-BE49-F238E27FC236}">
-                <a16:creationId xmlns:a16="http://schemas.microsoft.com/office/drawing/2014/main" id="{5F879CF7-343B-40AA-A1AD-0D6973354866}"/>
+                <a16:creationId xmlns:a16="http://schemas.microsoft.com/office/drawing/2014/main" id="{89FBD0FC-4C94-45B2-AA39-6ED995069D6B}"/>
               </a:ext>
             </a:extLst>
           </p:cNvPr>
@@ -747,7 +722,7 @@
           <p:cNvPr id="3" name="Subtitle">
             <a:extLst xmlns:a="http://schemas.openxmlformats.org/drawingml/2006/main">
               <a:ext uri="{FF2B5EF4-FFF2-40B4-BE49-F238E27FC236}">
-                <a16:creationId xmlns:a16="http://schemas.microsoft.com/office/drawing/2014/main" id="{16FC3EF6-9173-4903-85B5-3211A0F0BB03}"/>
+                <a16:creationId xmlns:a16="http://schemas.microsoft.com/office/drawing/2014/main" id="{AA7AC34D-05B7-420D-9AB4-B781FEDD40E7}"/>
               </a:ext>
             </a:extLst>
           </p:cNvPr>
@@ -911,7 +886,7 @@
           <p:cNvPr id="3" name="Accent rule">
             <a:extLst xmlns:a="http://schemas.openxmlformats.org/drawingml/2006/main">
               <a:ext uri="{FF2B5EF4-FFF2-40B4-BE49-F238E27FC236}">
-                <a16:creationId xmlns:a16="http://schemas.microsoft.com/office/drawing/2014/main" id="{122B9FFA-DC31-40E1-825D-E3CC236E6CB6}"/>
+                <a16:creationId xmlns:a16="http://schemas.microsoft.com/office/drawing/2014/main" id="{A304464E-05EA-41B9-A44A-DEF279F2A412}"/>
               </a:ext>
             </a:extLst>
           </p:cNvPr>
@@ -942,7 +917,7 @@
           <p:cNvPr id="2" name="Section title">
             <a:extLst xmlns:a="http://schemas.openxmlformats.org/drawingml/2006/main">
               <a:ext uri="{FF2B5EF4-FFF2-40B4-BE49-F238E27FC236}">
-                <a16:creationId xmlns:a16="http://schemas.microsoft.com/office/drawing/2014/main" id="{0B9E375A-0DD1-479B-9D0B-CD9C5681CEAC}"/>
+                <a16:creationId xmlns:a16="http://schemas.microsoft.com/office/drawing/2014/main" id="{6F51AB4B-267D-4B55-B7AB-D700C16CB540}"/>
               </a:ext>
             </a:extLst>
           </p:cNvPr>
@@ -1106,7 +1081,7 @@
           <p:cNvPr id="4" name="Accent rule">
             <a:extLst xmlns:a="http://schemas.openxmlformats.org/drawingml/2006/main">
               <a:ext uri="{FF2B5EF4-FFF2-40B4-BE49-F238E27FC236}">
-                <a16:creationId xmlns:a16="http://schemas.microsoft.com/office/drawing/2014/main" id="{C02B71A5-4E7F-4654-A4DF-49DBA39B5166}"/>
+                <a16:creationId xmlns:a16="http://schemas.microsoft.com/office/drawing/2014/main" id="{0027C0E2-1DE1-493E-AB34-43A79625A195}"/>
               </a:ext>
             </a:extLst>
           </p:cNvPr>
@@ -1137,7 +1112,7 @@
           <p:cNvPr id="2" name="Title">
             <a:extLst xmlns:a="http://schemas.openxmlformats.org/drawingml/2006/main">
               <a:ext uri="{FF2B5EF4-FFF2-40B4-BE49-F238E27FC236}">
-                <a16:creationId xmlns:a16="http://schemas.microsoft.com/office/drawing/2014/main" id="{C3F246D2-298D-4D4D-B08C-6D024C714122}"/>
+                <a16:creationId xmlns:a16="http://schemas.microsoft.com/office/drawing/2014/main" id="{E546BC25-2EE1-4F89-832B-FB6122E6AB19}"/>
               </a:ext>
             </a:extLst>
           </p:cNvPr>
@@ -1284,7 +1259,7 @@
           <p:cNvPr id="3" name="Body">
             <a:extLst xmlns:a="http://schemas.openxmlformats.org/drawingml/2006/main">
               <a:ext uri="{FF2B5EF4-FFF2-40B4-BE49-F238E27FC236}">
-                <a16:creationId xmlns:a16="http://schemas.microsoft.com/office/drawing/2014/main" id="{89020E61-D1A1-40BF-A000-41103604E9B3}"/>
+                <a16:creationId xmlns:a16="http://schemas.microsoft.com/office/drawing/2014/main" id="{C7E4E451-5C61-4D88-A7AE-1012D1347334}"/>
               </a:ext>
             </a:extLst>
           </p:cNvPr>
@@ -1448,7 +1423,7 @@
           <p:cNvPr id="5" name="Accent rule">
             <a:extLst xmlns:a="http://schemas.openxmlformats.org/drawingml/2006/main">
               <a:ext uri="{FF2B5EF4-FFF2-40B4-BE49-F238E27FC236}">
-                <a16:creationId xmlns:a16="http://schemas.microsoft.com/office/drawing/2014/main" id="{D7112373-FFBC-4E1C-8AE4-8305AE5B2F7D}"/>
+                <a16:creationId xmlns:a16="http://schemas.microsoft.com/office/drawing/2014/main" id="{587798E4-8ADD-434B-BCE3-4EC45AAAD718}"/>
               </a:ext>
             </a:extLst>
           </p:cNvPr>
@@ -1479,7 +1454,7 @@
           <p:cNvPr id="2" name="Title">
             <a:extLst xmlns:a="http://schemas.openxmlformats.org/drawingml/2006/main">
               <a:ext uri="{FF2B5EF4-FFF2-40B4-BE49-F238E27FC236}">
-                <a16:creationId xmlns:a16="http://schemas.microsoft.com/office/drawing/2014/main" id="{DCC1CFA7-D1CB-4A56-BF03-E7B3F53EAEB0}"/>
+                <a16:creationId xmlns:a16="http://schemas.microsoft.com/office/drawing/2014/main" id="{31C18B92-9E70-45AA-ADCB-75C11AE53B1C}"/>
               </a:ext>
             </a:extLst>
           </p:cNvPr>
@@ -1626,7 +1601,7 @@
           <p:cNvPr id="3" name="Left column">
             <a:extLst xmlns:a="http://schemas.openxmlformats.org/drawingml/2006/main">
               <a:ext uri="{FF2B5EF4-FFF2-40B4-BE49-F238E27FC236}">
-                <a16:creationId xmlns:a16="http://schemas.microsoft.com/office/drawing/2014/main" id="{F3588B07-1436-4707-93F7-CB589A0599BB}"/>
+                <a16:creationId xmlns:a16="http://schemas.microsoft.com/office/drawing/2014/main" id="{D224E1C1-D6C7-4072-9E18-740BF409B421}"/>
               </a:ext>
             </a:extLst>
           </p:cNvPr>
@@ -1773,7 +1748,7 @@
           <p:cNvPr id="4" name="Right column">
             <a:extLst xmlns:a="http://schemas.openxmlformats.org/drawingml/2006/main">
               <a:ext uri="{FF2B5EF4-FFF2-40B4-BE49-F238E27FC236}">
-                <a16:creationId xmlns:a16="http://schemas.microsoft.com/office/drawing/2014/main" id="{1F28DEF0-AADF-4DD3-919B-B7FF90FB040B}"/>
+                <a16:creationId xmlns:a16="http://schemas.microsoft.com/office/drawing/2014/main" id="{165C78D7-AFA4-4C13-B95E-BF28B3DDC359}"/>
               </a:ext>
             </a:extLst>
           </p:cNvPr>
@@ -1937,7 +1912,7 @@
           <p:cNvPr id="4" name="Accent rule">
             <a:extLst xmlns:a="http://schemas.openxmlformats.org/drawingml/2006/main">
               <a:ext uri="{FF2B5EF4-FFF2-40B4-BE49-F238E27FC236}">
-                <a16:creationId xmlns:a16="http://schemas.microsoft.com/office/drawing/2014/main" id="{0BC1A738-1161-4331-9450-7E0BDE116ACF}"/>
+                <a16:creationId xmlns:a16="http://schemas.microsoft.com/office/drawing/2014/main" id="{CE356C4F-FC04-42B3-821D-2C27BE5FC4DF}"/>
               </a:ext>
             </a:extLst>
           </p:cNvPr>
@@ -1968,7 +1943,7 @@
           <p:cNvPr id="2" name="Title">
             <a:extLst xmlns:a="http://schemas.openxmlformats.org/drawingml/2006/main">
               <a:ext uri="{FF2B5EF4-FFF2-40B4-BE49-F238E27FC236}">
-                <a16:creationId xmlns:a16="http://schemas.microsoft.com/office/drawing/2014/main" id="{36338058-70AE-447F-8FCC-E66A037FE3D7}"/>
+                <a16:creationId xmlns:a16="http://schemas.microsoft.com/office/drawing/2014/main" id="{FD116E65-D938-45CB-B074-B5CEC29AE845}"/>
               </a:ext>
             </a:extLst>
           </p:cNvPr>
@@ -2115,7 +2090,7 @@
           <p:cNvPr id="3" name="Left column">
             <a:extLst xmlns:a="http://schemas.openxmlformats.org/drawingml/2006/main">
               <a:ext uri="{FF2B5EF4-FFF2-40B4-BE49-F238E27FC236}">
-                <a16:creationId xmlns:a16="http://schemas.microsoft.com/office/drawing/2014/main" id="{805A045F-3378-4A9A-9D51-804EF02F99E5}"/>
+                <a16:creationId xmlns:a16="http://schemas.microsoft.com/office/drawing/2014/main" id="{6779B19C-7A28-479D-8B4E-6BE43511F02C}"/>
               </a:ext>
             </a:extLst>
           </p:cNvPr>
@@ -2300,12 +2275,12 @@
   </p:cSld>
   <p:clrMap bg1="lt1" tx1="dk1" bg2="lt2" tx2="dk2" accent1="accent1" accent2="accent2" accent3="accent3" accent4="accent4" accent5="accent5" accent6="accent6" hlink="hlink" folHlink="folHlink"/>
   <p:sldLayoutIdLst>
-    <p:sldLayoutId xmlns:r="http://schemas.openxmlformats.org/officeDocument/2006/relationships" id="2147483649" r:id="R662a9847c5f2421c"/>
-    <p:sldLayoutId xmlns:r="http://schemas.openxmlformats.org/officeDocument/2006/relationships" id="2147483650" r:id="Rca3490ebd2344f0c"/>
-    <p:sldLayoutId xmlns:r="http://schemas.openxmlformats.org/officeDocument/2006/relationships" id="2147483651" r:id="Rb96f9ec0bc064568"/>
-    <p:sldLayoutId xmlns:r="http://schemas.openxmlformats.org/officeDocument/2006/relationships" id="2147483652" r:id="R99c362f43bbd47b6"/>
-    <p:sldLayoutId xmlns:r="http://schemas.openxmlformats.org/officeDocument/2006/relationships" id="2147483653" r:id="Rf4bc0f87fe0e433d"/>
-    <p:sldLayoutId xmlns:r="http://schemas.openxmlformats.org/officeDocument/2006/relationships" id="2147483654" r:id="R60a7329600044ff8"/>
+    <p:sldLayoutId xmlns:r="http://schemas.openxmlformats.org/officeDocument/2006/relationships" id="2147483649" r:id="R97777f43961a439f"/>
+    <p:sldLayoutId xmlns:r="http://schemas.openxmlformats.org/officeDocument/2006/relationships" id="2147483650" r:id="Rffa43a81558a42c2"/>
+    <p:sldLayoutId xmlns:r="http://schemas.openxmlformats.org/officeDocument/2006/relationships" id="2147483651" r:id="R4b209c8609074275"/>
+    <p:sldLayoutId xmlns:r="http://schemas.openxmlformats.org/officeDocument/2006/relationships" id="2147483652" r:id="R94dca4e8d0a34364"/>
+    <p:sldLayoutId xmlns:r="http://schemas.openxmlformats.org/officeDocument/2006/relationships" id="2147483653" r:id="Re93bd530c83d4f8d"/>
+    <p:sldLayoutId xmlns:r="http://schemas.openxmlformats.org/officeDocument/2006/relationships" id="2147483654" r:id="R6f95ac3a732f4ab5"/>
   </p:sldLayoutIdLst>
   <p:txStyles>
     <p:titleStyle>
@@ -2838,7 +2813,7 @@
     <p:bg>
       <p:bgPr>
         <a:solidFill xmlns:a="http://schemas.openxmlformats.org/drawingml/2006/main">
-          <a:srgbClr val="FFFCF2"/>
+          <a:srgbClr val="FFFDF5"/>
         </a:solidFill>
       </p:bgPr>
     </p:bg>
@@ -2853,10 +2828,10 @@
       </p:grpSpPr>
       <p:sp>
         <p:nvSpPr>
-          <p:cNvPr id="11" name="">
+          <p:cNvPr id="31" name="">
             <a:extLst xmlns:a="http://schemas.openxmlformats.org/drawingml/2006/main">
               <a:ext uri="{FF2B5EF4-FFF2-40B4-BE49-F238E27FC236}">
-                <a16:creationId xmlns:a16="http://schemas.microsoft.com/office/drawing/2014/main" id="{2A3E6812-13CD-4A67-A36C-C159468A5CCF}"/>
+                <a16:creationId xmlns:a16="http://schemas.microsoft.com/office/drawing/2014/main" id="{22FBC52F-70DA-4159-81E4-5AAC74CB7E47}"/>
               </a:ext>
             </a:extLst>
           </p:cNvPr>
@@ -2867,8 +2842,8 @@
         </p:nvSpPr>
         <p:spPr>
           <a:xfrm xmlns:a="http://schemas.openxmlformats.org/drawingml/2006/main">
-            <a:off x="609600" y="333375"/>
-            <a:ext cx="10972800" cy="714375"/>
+            <a:off x="609600" y="323850"/>
+            <a:ext cx="10972800" cy="666750"/>
           </a:xfrm>
           <a:prstGeom xmlns:a="http://schemas.openxmlformats.org/drawingml/2006/main" prst="rect">
             <a:avLst/>
@@ -2885,23 +2860,23 @@
           <a:lstStyle xmlns:a="http://schemas.openxmlformats.org/drawingml/2006/main"/>
           <a:p xmlns:a="http://schemas.openxmlformats.org/drawingml/2006/main">
             <a:pPr>
-              <a:defRPr sz="4050" b="1">
+              <a:defRPr sz="3450" b="1">
                 <a:solidFill>
-                  <a:srgbClr val="242720"/>
+                  <a:srgbClr val="263C3A"/>
                 </a:solidFill>
-                <a:latin typeface="Arial"/>
-                <a:ea typeface="Arial"/>
-                <a:cs typeface="Arial"/>
+                <a:latin typeface="DejaVu Sans"/>
+                <a:ea typeface="DejaVu Sans"/>
+                <a:cs typeface="DejaVu Sans"/>
               </a:defRPr>
             </a:pPr>
             <a:r>
-              <a:rPr sz="4050" b="1">
+              <a:rPr sz="3450" b="1">
                 <a:solidFill>
-                  <a:srgbClr val="242720"/>
+                  <a:srgbClr val="263C3A"/>
                 </a:solidFill>
-                <a:latin typeface="Arial"/>
-                <a:ea typeface="Arial"/>
-                <a:cs typeface="Arial"/>
+                <a:latin typeface="DejaVu Sans"/>
+                <a:ea typeface="DejaVu Sans"/>
+                <a:cs typeface="DejaVu Sans"/>
               </a:rPr>
               <a:t>Retrieval placemat</a:t>
             </a:r>
@@ -2913,7 +2888,7 @@
           <p:cNvPr id="2" name="">
             <a:extLst xmlns:a="http://schemas.openxmlformats.org/drawingml/2006/main">
               <a:ext uri="{FF2B5EF4-FFF2-40B4-BE49-F238E27FC236}">
-                <a16:creationId xmlns:a16="http://schemas.microsoft.com/office/drawing/2014/main" id="{8558A4C5-9B30-4F02-9792-1D43D6FB6EAE}"/>
+                <a16:creationId xmlns:a16="http://schemas.microsoft.com/office/drawing/2014/main" id="{14F9316A-4378-4228-B869-0DCDE8D92C07}"/>
               </a:ext>
             </a:extLst>
           </p:cNvPr>
@@ -2924,8 +2899,8 @@
         </p:nvSpPr>
         <p:spPr>
           <a:xfrm xmlns:a="http://schemas.openxmlformats.org/drawingml/2006/main">
-            <a:off x="609600" y="1190625"/>
-            <a:ext cx="10972800" cy="476250"/>
+            <a:off x="609600" y="1085850"/>
+            <a:ext cx="10972800" cy="409575"/>
           </a:xfrm>
           <a:prstGeom xmlns:a="http://schemas.openxmlformats.org/drawingml/2006/main" prst="rect">
             <a:avLst/>
@@ -2942,25 +2917,25 @@
           <a:lstStyle xmlns:a="http://schemas.openxmlformats.org/drawingml/2006/main"/>
           <a:p xmlns:a="http://schemas.openxmlformats.org/drawingml/2006/main">
             <a:pPr>
-              <a:defRPr sz="2400" b="0">
+              <a:defRPr sz="2175" b="0">
                 <a:solidFill>
-                  <a:srgbClr val="242720"/>
+                  <a:srgbClr val="687572"/>
                 </a:solidFill>
-                <a:latin typeface="Arial"/>
-                <a:ea typeface="Arial"/>
-                <a:cs typeface="Arial"/>
+                <a:latin typeface="DejaVu Sans"/>
+                <a:ea typeface="DejaVu Sans"/>
+                <a:cs typeface="DejaVu Sans"/>
               </a:defRPr>
             </a:pPr>
             <a:r>
-              <a:rPr sz="2400" b="0">
+              <a:rPr sz="2175" b="0">
                 <a:solidFill>
-                  <a:srgbClr val="242720"/>
+                  <a:srgbClr val="687572"/>
                 </a:solidFill>
-                <a:latin typeface="Arial"/>
-                <a:ea typeface="Arial"/>
-                <a:cs typeface="Arial"/>
+                <a:latin typeface="DejaVu Sans"/>
+                <a:ea typeface="DejaVu Sans"/>
+                <a:cs typeface="DejaVu Sans"/>
               </a:rPr>
-              <a:t>[Add your topic or retrieval focus]</a:t>
+              <a:t>[Your topic or retrieval focus]</a:t>
             </a:r>
           </a:p>
         </p:txBody>
@@ -2970,7 +2945,7 @@
           <p:cNvPr id="3" name="">
             <a:extLst xmlns:a="http://schemas.openxmlformats.org/drawingml/2006/main">
               <a:ext uri="{FF2B5EF4-FFF2-40B4-BE49-F238E27FC236}">
-                <a16:creationId xmlns:a16="http://schemas.microsoft.com/office/drawing/2014/main" id="{0CAE1A3C-2907-44BC-9109-241B222DF047}"/>
+                <a16:creationId xmlns:a16="http://schemas.microsoft.com/office/drawing/2014/main" id="{5507410B-040B-435E-8BE6-97D54BE734BF}"/>
               </a:ext>
             </a:extLst>
           </p:cNvPr>
@@ -2981,8 +2956,38 @@
         </p:nvSpPr>
         <p:spPr>
           <a:xfrm xmlns:a="http://schemas.openxmlformats.org/drawingml/2006/main">
-            <a:off x="609600" y="1733550"/>
-            <a:ext cx="10972800" cy="400050"/>
+            <a:off x="609600" y="1676400"/>
+            <a:ext cx="10972800" cy="19050"/>
+          </a:xfrm>
+          <a:prstGeom xmlns:a="http://schemas.openxmlformats.org/drawingml/2006/main" prst="rect">
+            <a:avLst/>
+          </a:prstGeom>
+          <a:solidFill xmlns:a="http://schemas.openxmlformats.org/drawingml/2006/main">
+            <a:srgbClr val="A9BDB7"/>
+          </a:solidFill>
+          <a:ln xmlns:a="http://schemas.openxmlformats.org/drawingml/2006/main" w="0">
+            <a:noFill/>
+          </a:ln>
+        </p:spPr>
+      </p:sp>
+      <p:sp>
+        <p:nvSpPr>
+          <p:cNvPr id="4" name="">
+            <a:extLst xmlns:a="http://schemas.openxmlformats.org/drawingml/2006/main">
+              <a:ext uri="{FF2B5EF4-FFF2-40B4-BE49-F238E27FC236}">
+                <a16:creationId xmlns:a16="http://schemas.microsoft.com/office/drawing/2014/main" id="{6536BAFF-89E9-441F-B433-A8BD35BC0096}"/>
+              </a:ext>
+            </a:extLst>
+          </p:cNvPr>
+          <p:cNvSpPr>
+            <a:spLocks xmlns:a="http://schemas.openxmlformats.org/drawingml/2006/main" noGrp="1"/>
+          </p:cNvSpPr>
+          <p:nvPr/>
+        </p:nvSpPr>
+        <p:spPr>
+          <a:xfrm xmlns:a="http://schemas.openxmlformats.org/drawingml/2006/main">
+            <a:off x="609600" y="1828800"/>
+            <a:ext cx="4476750" cy="304800"/>
           </a:xfrm>
           <a:prstGeom xmlns:a="http://schemas.openxmlformats.org/drawingml/2006/main" prst="rect">
             <a:avLst/>
@@ -2999,35 +3004,35 @@
           <a:lstStyle xmlns:a="http://schemas.openxmlformats.org/drawingml/2006/main"/>
           <a:p xmlns:a="http://schemas.openxmlformats.org/drawingml/2006/main">
             <a:pPr>
-              <a:defRPr sz="1800" b="0">
+              <a:defRPr sz="1575" b="1">
                 <a:solidFill>
-                  <a:srgbClr val="28534A"/>
+                  <a:srgbClr val="263C3A"/>
                 </a:solidFill>
-                <a:latin typeface="Arial"/>
-                <a:ea typeface="Arial"/>
-                <a:cs typeface="Arial"/>
+                <a:latin typeface="DejaVu Sans"/>
+                <a:ea typeface="DejaVu Sans"/>
+                <a:cs typeface="DejaVu Sans"/>
               </a:defRPr>
             </a:pPr>
             <a:r>
-              <a:rPr sz="1800" b="0">
+              <a:rPr sz="1575" b="1">
                 <a:solidFill>
-                  <a:srgbClr val="28534A"/>
+                  <a:srgbClr val="263C3A"/>
                 </a:solidFill>
-                <a:latin typeface="Arial"/>
-                <a:ea typeface="Arial"/>
-                <a:cs typeface="Arial"/>
+                <a:latin typeface="DejaVu Sans"/>
+                <a:ea typeface="DejaVu Sans"/>
+                <a:cs typeface="DejaVu Sans"/>
               </a:rPr>
-              <a:t>Recall independently first. Check and improve after feedback.</a:t>
+              <a:t>01  Recall from memory</a:t>
             </a:r>
           </a:p>
         </p:txBody>
       </p:sp>
       <p:sp>
         <p:nvSpPr>
-          <p:cNvPr id="4" name="">
+          <p:cNvPr id="5" name="">
             <a:extLst xmlns:a="http://schemas.openxmlformats.org/drawingml/2006/main">
               <a:ext uri="{FF2B5EF4-FFF2-40B4-BE49-F238E27FC236}">
-                <a16:creationId xmlns:a16="http://schemas.microsoft.com/office/drawing/2014/main" id="{1D999FEB-4C86-4D2E-B68D-BC07DB44E413}"/>
+                <a16:creationId xmlns:a16="http://schemas.microsoft.com/office/drawing/2014/main" id="{593F1D05-DA85-47F3-BD3B-73367E061286}"/>
               </a:ext>
             </a:extLst>
           </p:cNvPr>
@@ -3038,21 +3043,252 @@
         </p:nvSpPr>
         <p:spPr>
           <a:xfrm xmlns:a="http://schemas.openxmlformats.org/drawingml/2006/main">
-            <a:off x="609600" y="2190750"/>
-            <a:ext cx="5400675" cy="1295400"/>
+            <a:off x="6286500" y="1828800"/>
+            <a:ext cx="5048250" cy="304800"/>
           </a:xfrm>
           <a:prstGeom xmlns:a="http://schemas.openxmlformats.org/drawingml/2006/main" prst="rect">
             <a:avLst/>
           </a:prstGeom>
           <a:noFill xmlns:a="http://schemas.openxmlformats.org/drawingml/2006/main"/>
+          <a:ln xmlns:a="http://schemas.openxmlformats.org/drawingml/2006/main" w="0">
+            <a:noFill/>
+          </a:ln>
+        </p:spPr>
+        <p:txBody>
+          <a:bodyPr xmlns:a="http://schemas.openxmlformats.org/drawingml/2006/main" lIns="0" tIns="0" rIns="0" bIns="0" anchor="t">
+            <a:noAutofit/>
+          </a:bodyPr>
+          <a:lstStyle xmlns:a="http://schemas.openxmlformats.org/drawingml/2006/main"/>
+          <a:p xmlns:a="http://schemas.openxmlformats.org/drawingml/2006/main">
+            <a:pPr>
+              <a:defRPr sz="1575" b="1">
+                <a:solidFill>
+                  <a:srgbClr val="263C3A"/>
+                </a:solidFill>
+                <a:latin typeface="DejaVu Sans"/>
+                <a:ea typeface="DejaVu Sans"/>
+                <a:cs typeface="DejaVu Sans"/>
+              </a:defRPr>
+            </a:pPr>
+            <a:r>
+              <a:rPr sz="1575" b="1">
+                <a:solidFill>
+                  <a:srgbClr val="263C3A"/>
+                </a:solidFill>
+                <a:latin typeface="DejaVu Sans"/>
+                <a:ea typeface="DejaVu Sans"/>
+                <a:cs typeface="DejaVu Sans"/>
+              </a:rPr>
+              <a:t>02  Check and improve</a:t>
+            </a:r>
+          </a:p>
+        </p:txBody>
+      </p:sp>
+      <p:sp>
+        <p:nvSpPr>
+          <p:cNvPr id="6" name="">
+            <a:extLst xmlns:a="http://schemas.openxmlformats.org/drawingml/2006/main">
+              <a:ext uri="{FF2B5EF4-FFF2-40B4-BE49-F238E27FC236}">
+                <a16:creationId xmlns:a16="http://schemas.microsoft.com/office/drawing/2014/main" id="{4509D5E3-AB9F-4E0D-A6C0-EA6D80D9AAC8}"/>
+              </a:ext>
+            </a:extLst>
+          </p:cNvPr>
+          <p:cNvSpPr>
+            <a:spLocks xmlns:a="http://schemas.openxmlformats.org/drawingml/2006/main" noGrp="1"/>
+          </p:cNvSpPr>
+          <p:nvPr/>
+        </p:nvSpPr>
+        <p:spPr>
+          <a:xfrm xmlns:a="http://schemas.openxmlformats.org/drawingml/2006/main">
+            <a:off x="609600" y="2247900"/>
+            <a:ext cx="5400675" cy="1343025"/>
+          </a:xfrm>
+          <a:prstGeom xmlns:a="http://schemas.openxmlformats.org/drawingml/2006/main" prst="rect">
+            <a:avLst/>
+          </a:prstGeom>
+          <a:solidFill xmlns:a="http://schemas.openxmlformats.org/drawingml/2006/main">
+            <a:srgbClr val="EDF2F5"/>
+          </a:solidFill>
           <a:ln xmlns:a="http://schemas.openxmlformats.org/drawingml/2006/main" w="9525">
             <a:solidFill>
-              <a:srgbClr val="CBD0C4"/>
+              <a:srgbClr val="D4DFDB"/>
             </a:solidFill>
           </a:ln>
         </p:spPr>
+      </p:sp>
+      <p:sp>
+        <p:nvSpPr>
+          <p:cNvPr id="7" name="">
+            <a:extLst xmlns:a="http://schemas.openxmlformats.org/drawingml/2006/main">
+              <a:ext uri="{FF2B5EF4-FFF2-40B4-BE49-F238E27FC236}">
+                <a16:creationId xmlns:a16="http://schemas.microsoft.com/office/drawing/2014/main" id="{34A22D35-B4BF-4ECB-B1DF-0FBA2FE5186D}"/>
+              </a:ext>
+            </a:extLst>
+          </p:cNvPr>
+          <p:cNvSpPr>
+            <a:spLocks xmlns:a="http://schemas.openxmlformats.org/drawingml/2006/main" noGrp="1"/>
+          </p:cNvSpPr>
+          <p:nvPr/>
+        </p:nvSpPr>
+        <p:spPr>
+          <a:xfrm xmlns:a="http://schemas.openxmlformats.org/drawingml/2006/main">
+            <a:off x="800100" y="2419350"/>
+            <a:ext cx="381000" cy="381000"/>
+          </a:xfrm>
+          <a:prstGeom xmlns:a="http://schemas.openxmlformats.org/drawingml/2006/main" prst="ellipse">
+            <a:avLst/>
+          </a:prstGeom>
+          <a:solidFill xmlns:a="http://schemas.openxmlformats.org/drawingml/2006/main">
+            <a:srgbClr val="FFFFFF"/>
+          </a:solidFill>
+          <a:ln xmlns:a="http://schemas.openxmlformats.org/drawingml/2006/main" w="0">
+            <a:noFill/>
+          </a:ln>
+        </p:spPr>
+      </p:sp>
+      <p:sp>
+        <p:nvSpPr>
+          <p:cNvPr id="8" name="">
+            <a:extLst xmlns:a="http://schemas.openxmlformats.org/drawingml/2006/main">
+              <a:ext uri="{FF2B5EF4-FFF2-40B4-BE49-F238E27FC236}">
+                <a16:creationId xmlns:a16="http://schemas.microsoft.com/office/drawing/2014/main" id="{A801FF92-9E8C-423E-8586-32B519277EA0}"/>
+              </a:ext>
+            </a:extLst>
+          </p:cNvPr>
+          <p:cNvSpPr>
+            <a:spLocks xmlns:a="http://schemas.openxmlformats.org/drawingml/2006/main" noGrp="1"/>
+          </p:cNvSpPr>
+          <p:nvPr/>
+        </p:nvSpPr>
+        <p:spPr>
+          <a:xfrm xmlns:a="http://schemas.openxmlformats.org/drawingml/2006/main">
+            <a:off x="857250" y="2486025"/>
+            <a:ext cx="342900" cy="285750"/>
+          </a:xfrm>
+          <a:prstGeom xmlns:a="http://schemas.openxmlformats.org/drawingml/2006/main" prst="rect">
+            <a:avLst/>
+          </a:prstGeom>
+          <a:noFill xmlns:a="http://schemas.openxmlformats.org/drawingml/2006/main"/>
+          <a:ln xmlns:a="http://schemas.openxmlformats.org/drawingml/2006/main" w="0">
+            <a:noFill/>
+          </a:ln>
+        </p:spPr>
         <p:txBody>
-          <a:bodyPr xmlns:a="http://schemas.openxmlformats.org/drawingml/2006/main" lIns="142875" tIns="114300" rIns="142875" bIns="0" anchor="t">
+          <a:bodyPr xmlns:a="http://schemas.openxmlformats.org/drawingml/2006/main" lIns="0" tIns="0" rIns="0" bIns="0" anchor="t">
+            <a:noAutofit/>
+          </a:bodyPr>
+          <a:lstStyle xmlns:a="http://schemas.openxmlformats.org/drawingml/2006/main"/>
+          <a:p xmlns:a="http://schemas.openxmlformats.org/drawingml/2006/main">
+            <a:pPr>
+              <a:defRPr sz="1350" b="1">
+                <a:solidFill>
+                  <a:srgbClr val="263C3A"/>
+                </a:solidFill>
+                <a:latin typeface="DejaVu Sans"/>
+                <a:ea typeface="DejaVu Sans"/>
+                <a:cs typeface="DejaVu Sans"/>
+              </a:defRPr>
+            </a:pPr>
+            <a:r>
+              <a:rPr sz="1350" b="1">
+                <a:solidFill>
+                  <a:srgbClr val="263C3A"/>
+                </a:solidFill>
+                <a:latin typeface="DejaVu Sans"/>
+                <a:ea typeface="DejaVu Sans"/>
+                <a:cs typeface="DejaVu Sans"/>
+              </a:rPr>
+              <a:t>01</a:t>
+            </a:r>
+          </a:p>
+        </p:txBody>
+      </p:sp>
+      <p:sp>
+        <p:nvSpPr>
+          <p:cNvPr id="9" name="">
+            <a:extLst xmlns:a="http://schemas.openxmlformats.org/drawingml/2006/main">
+              <a:ext uri="{FF2B5EF4-FFF2-40B4-BE49-F238E27FC236}">
+                <a16:creationId xmlns:a16="http://schemas.microsoft.com/office/drawing/2014/main" id="{020803D9-3588-4977-A501-834D628DBD2B}"/>
+              </a:ext>
+            </a:extLst>
+          </p:cNvPr>
+          <p:cNvSpPr>
+            <a:spLocks xmlns:a="http://schemas.openxmlformats.org/drawingml/2006/main" noGrp="1"/>
+          </p:cNvSpPr>
+          <p:nvPr/>
+        </p:nvSpPr>
+        <p:spPr>
+          <a:xfrm xmlns:a="http://schemas.openxmlformats.org/drawingml/2006/main">
+            <a:off x="1352550" y="2466975"/>
+            <a:ext cx="4467225" cy="428625"/>
+          </a:xfrm>
+          <a:prstGeom xmlns:a="http://schemas.openxmlformats.org/drawingml/2006/main" prst="rect">
+            <a:avLst/>
+          </a:prstGeom>
+          <a:noFill xmlns:a="http://schemas.openxmlformats.org/drawingml/2006/main"/>
+          <a:ln xmlns:a="http://schemas.openxmlformats.org/drawingml/2006/main" w="0">
+            <a:noFill/>
+          </a:ln>
+        </p:spPr>
+        <p:txBody>
+          <a:bodyPr xmlns:a="http://schemas.openxmlformats.org/drawingml/2006/main" lIns="0" tIns="0" rIns="0" bIns="0" anchor="t">
+            <a:noAutofit/>
+          </a:bodyPr>
+          <a:lstStyle xmlns:a="http://schemas.openxmlformats.org/drawingml/2006/main"/>
+          <a:p xmlns:a="http://schemas.openxmlformats.org/drawingml/2006/main">
+            <a:pPr>
+              <a:defRPr sz="1725" b="1">
+                <a:solidFill>
+                  <a:srgbClr val="263C3A"/>
+                </a:solidFill>
+                <a:latin typeface="DejaVu Sans"/>
+                <a:ea typeface="DejaVu Sans"/>
+                <a:cs typeface="DejaVu Sans"/>
+              </a:defRPr>
+            </a:pPr>
+            <a:r>
+              <a:rPr sz="1725" b="1">
+                <a:solidFill>
+                  <a:srgbClr val="263C3A"/>
+                </a:solidFill>
+                <a:latin typeface="DejaVu Sans"/>
+                <a:ea typeface="DejaVu Sans"/>
+                <a:cs typeface="DejaVu Sans"/>
+              </a:rPr>
+              <a:t>Learner 1</a:t>
+            </a:r>
+          </a:p>
+        </p:txBody>
+      </p:sp>
+      <p:sp>
+        <p:nvSpPr>
+          <p:cNvPr id="10" name="">
+            <a:extLst xmlns:a="http://schemas.openxmlformats.org/drawingml/2006/main">
+              <a:ext uri="{FF2B5EF4-FFF2-40B4-BE49-F238E27FC236}">
+                <a16:creationId xmlns:a16="http://schemas.microsoft.com/office/drawing/2014/main" id="{2418F5DB-70BE-4589-8AB0-1C453C192D10}"/>
+              </a:ext>
+            </a:extLst>
+          </p:cNvPr>
+          <p:cNvSpPr>
+            <a:spLocks xmlns:a="http://schemas.openxmlformats.org/drawingml/2006/main" noGrp="1"/>
+          </p:cNvSpPr>
+          <p:nvPr/>
+        </p:nvSpPr>
+        <p:spPr>
+          <a:xfrm xmlns:a="http://schemas.openxmlformats.org/drawingml/2006/main">
+            <a:off x="819150" y="2990850"/>
+            <a:ext cx="4981575" cy="438150"/>
+          </a:xfrm>
+          <a:prstGeom xmlns:a="http://schemas.openxmlformats.org/drawingml/2006/main" prst="rect">
+            <a:avLst/>
+          </a:prstGeom>
+          <a:noFill xmlns:a="http://schemas.openxmlformats.org/drawingml/2006/main"/>
+          <a:ln xmlns:a="http://schemas.openxmlformats.org/drawingml/2006/main" w="0">
+            <a:noFill/>
+          </a:ln>
+        </p:spPr>
+        <p:txBody>
+          <a:bodyPr xmlns:a="http://schemas.openxmlformats.org/drawingml/2006/main" lIns="0" tIns="0" rIns="0" bIns="0" anchor="t">
             <a:noAutofit/>
           </a:bodyPr>
           <a:lstStyle xmlns:a="http://schemas.openxmlformats.org/drawingml/2006/main"/>
@@ -3060,44 +3296,21 @@
             <a:pPr>
               <a:defRPr sz="1950" b="0">
                 <a:solidFill>
-                  <a:srgbClr val="42473D"/>
+                  <a:srgbClr val="687572"/>
                 </a:solidFill>
-                <a:latin typeface="Arial"/>
-                <a:ea typeface="Arial"/>
-                <a:cs typeface="Arial"/>
+                <a:latin typeface="DejaVu Sans"/>
+                <a:ea typeface="DejaVu Sans"/>
+                <a:cs typeface="DejaVu Sans"/>
               </a:defRPr>
             </a:pPr>
             <a:r>
               <a:rPr sz="1950" b="0">
                 <a:solidFill>
-                  <a:srgbClr val="42473D"/>
+                  <a:srgbClr val="687572"/>
                 </a:solidFill>
-                <a:latin typeface="Arial"/>
-                <a:ea typeface="Arial"/>
-                <a:cs typeface="Arial"/>
-              </a:rPr>
-              <a:t>Learner 1</a:t>
-            </a:r>
-          </a:p>
-          <a:p xmlns:a="http://schemas.openxmlformats.org/drawingml/2006/main">
-            <a:pPr>
-              <a:defRPr sz="1950" b="0">
-                <a:solidFill>
-                  <a:srgbClr val="42473D"/>
-                </a:solidFill>
-                <a:latin typeface="Arial"/>
-                <a:ea typeface="Arial"/>
-                <a:cs typeface="Arial"/>
-              </a:defRPr>
-            </a:pPr>
-            <a:r>
-              <a:rPr sz="1950" b="0">
-                <a:solidFill>
-                  <a:srgbClr val="42473D"/>
-                </a:solidFill>
-                <a:latin typeface="Arial"/>
-                <a:ea typeface="Arial"/>
-                <a:cs typeface="Arial"/>
+                <a:latin typeface="DejaVu Sans"/>
+                <a:ea typeface="DejaVu Sans"/>
+                <a:cs typeface="DejaVu Sans"/>
               </a:rPr>
               <a:t>Independent recall</a:t>
             </a:r>
@@ -3106,10 +3319,10 @@
       </p:sp>
       <p:sp>
         <p:nvSpPr>
-          <p:cNvPr id="5" name="">
+          <p:cNvPr id="11" name="">
             <a:extLst xmlns:a="http://schemas.openxmlformats.org/drawingml/2006/main">
               <a:ext uri="{FF2B5EF4-FFF2-40B4-BE49-F238E27FC236}">
-                <a16:creationId xmlns:a16="http://schemas.microsoft.com/office/drawing/2014/main" id="{A07921F1-9945-422E-86A4-40BC2CDFBC13}"/>
+                <a16:creationId xmlns:a16="http://schemas.microsoft.com/office/drawing/2014/main" id="{F3BB0881-FF41-4DE2-9841-F2C33E246B36}"/>
               </a:ext>
             </a:extLst>
           </p:cNvPr>
@@ -3120,21 +3333,195 @@
         </p:nvSpPr>
         <p:spPr>
           <a:xfrm xmlns:a="http://schemas.openxmlformats.org/drawingml/2006/main">
-            <a:off x="6181725" y="2190750"/>
-            <a:ext cx="5400675" cy="1295400"/>
+            <a:off x="6181725" y="2247900"/>
+            <a:ext cx="5400675" cy="1343025"/>
           </a:xfrm>
           <a:prstGeom xmlns:a="http://schemas.openxmlformats.org/drawingml/2006/main" prst="rect">
             <a:avLst/>
           </a:prstGeom>
-          <a:noFill xmlns:a="http://schemas.openxmlformats.org/drawingml/2006/main"/>
+          <a:solidFill xmlns:a="http://schemas.openxmlformats.org/drawingml/2006/main">
+            <a:srgbClr val="EAF1EC"/>
+          </a:solidFill>
           <a:ln xmlns:a="http://schemas.openxmlformats.org/drawingml/2006/main" w="9525">
             <a:solidFill>
-              <a:srgbClr val="CBD0C4"/>
+              <a:srgbClr val="D4DFDB"/>
             </a:solidFill>
           </a:ln>
         </p:spPr>
+      </p:sp>
+      <p:sp>
+        <p:nvSpPr>
+          <p:cNvPr id="12" name="">
+            <a:extLst xmlns:a="http://schemas.openxmlformats.org/drawingml/2006/main">
+              <a:ext uri="{FF2B5EF4-FFF2-40B4-BE49-F238E27FC236}">
+                <a16:creationId xmlns:a16="http://schemas.microsoft.com/office/drawing/2014/main" id="{FD9467AF-93B8-4039-839C-986A74A15C84}"/>
+              </a:ext>
+            </a:extLst>
+          </p:cNvPr>
+          <p:cNvSpPr>
+            <a:spLocks xmlns:a="http://schemas.openxmlformats.org/drawingml/2006/main" noGrp="1"/>
+          </p:cNvSpPr>
+          <p:nvPr/>
+        </p:nvSpPr>
+        <p:spPr>
+          <a:xfrm xmlns:a="http://schemas.openxmlformats.org/drawingml/2006/main">
+            <a:off x="6372225" y="2419350"/>
+            <a:ext cx="381000" cy="381000"/>
+          </a:xfrm>
+          <a:prstGeom xmlns:a="http://schemas.openxmlformats.org/drawingml/2006/main" prst="ellipse">
+            <a:avLst/>
+          </a:prstGeom>
+          <a:solidFill xmlns:a="http://schemas.openxmlformats.org/drawingml/2006/main">
+            <a:srgbClr val="FFFFFF"/>
+          </a:solidFill>
+          <a:ln xmlns:a="http://schemas.openxmlformats.org/drawingml/2006/main" w="0">
+            <a:noFill/>
+          </a:ln>
+        </p:spPr>
+      </p:sp>
+      <p:sp>
+        <p:nvSpPr>
+          <p:cNvPr id="13" name="">
+            <a:extLst xmlns:a="http://schemas.openxmlformats.org/drawingml/2006/main">
+              <a:ext uri="{FF2B5EF4-FFF2-40B4-BE49-F238E27FC236}">
+                <a16:creationId xmlns:a16="http://schemas.microsoft.com/office/drawing/2014/main" id="{03BBDB2F-B712-43DF-A70A-B2801B384425}"/>
+              </a:ext>
+            </a:extLst>
+          </p:cNvPr>
+          <p:cNvSpPr>
+            <a:spLocks xmlns:a="http://schemas.openxmlformats.org/drawingml/2006/main" noGrp="1"/>
+          </p:cNvSpPr>
+          <p:nvPr/>
+        </p:nvSpPr>
+        <p:spPr>
+          <a:xfrm xmlns:a="http://schemas.openxmlformats.org/drawingml/2006/main">
+            <a:off x="6429375" y="2486025"/>
+            <a:ext cx="342900" cy="285750"/>
+          </a:xfrm>
+          <a:prstGeom xmlns:a="http://schemas.openxmlformats.org/drawingml/2006/main" prst="rect">
+            <a:avLst/>
+          </a:prstGeom>
+          <a:noFill xmlns:a="http://schemas.openxmlformats.org/drawingml/2006/main"/>
+          <a:ln xmlns:a="http://schemas.openxmlformats.org/drawingml/2006/main" w="0">
+            <a:noFill/>
+          </a:ln>
+        </p:spPr>
         <p:txBody>
-          <a:bodyPr xmlns:a="http://schemas.openxmlformats.org/drawingml/2006/main" lIns="142875" tIns="114300" rIns="142875" bIns="0" anchor="t">
+          <a:bodyPr xmlns:a="http://schemas.openxmlformats.org/drawingml/2006/main" lIns="0" tIns="0" rIns="0" bIns="0" anchor="t">
+            <a:noAutofit/>
+          </a:bodyPr>
+          <a:lstStyle xmlns:a="http://schemas.openxmlformats.org/drawingml/2006/main"/>
+          <a:p xmlns:a="http://schemas.openxmlformats.org/drawingml/2006/main">
+            <a:pPr>
+              <a:defRPr sz="1350" b="1">
+                <a:solidFill>
+                  <a:srgbClr val="263C3A"/>
+                </a:solidFill>
+                <a:latin typeface="DejaVu Sans"/>
+                <a:ea typeface="DejaVu Sans"/>
+                <a:cs typeface="DejaVu Sans"/>
+              </a:defRPr>
+            </a:pPr>
+            <a:r>
+              <a:rPr sz="1350" b="1">
+                <a:solidFill>
+                  <a:srgbClr val="263C3A"/>
+                </a:solidFill>
+                <a:latin typeface="DejaVu Sans"/>
+                <a:ea typeface="DejaVu Sans"/>
+                <a:cs typeface="DejaVu Sans"/>
+              </a:rPr>
+              <a:t>02</a:t>
+            </a:r>
+          </a:p>
+        </p:txBody>
+      </p:sp>
+      <p:sp>
+        <p:nvSpPr>
+          <p:cNvPr id="14" name="">
+            <a:extLst xmlns:a="http://schemas.openxmlformats.org/drawingml/2006/main">
+              <a:ext uri="{FF2B5EF4-FFF2-40B4-BE49-F238E27FC236}">
+                <a16:creationId xmlns:a16="http://schemas.microsoft.com/office/drawing/2014/main" id="{9DC241FB-F2B7-4ED4-834F-551E8BABFEB4}"/>
+              </a:ext>
+            </a:extLst>
+          </p:cNvPr>
+          <p:cNvSpPr>
+            <a:spLocks xmlns:a="http://schemas.openxmlformats.org/drawingml/2006/main" noGrp="1"/>
+          </p:cNvSpPr>
+          <p:nvPr/>
+        </p:nvSpPr>
+        <p:spPr>
+          <a:xfrm xmlns:a="http://schemas.openxmlformats.org/drawingml/2006/main">
+            <a:off x="6924675" y="2466975"/>
+            <a:ext cx="4467225" cy="428625"/>
+          </a:xfrm>
+          <a:prstGeom xmlns:a="http://schemas.openxmlformats.org/drawingml/2006/main" prst="rect">
+            <a:avLst/>
+          </a:prstGeom>
+          <a:noFill xmlns:a="http://schemas.openxmlformats.org/drawingml/2006/main"/>
+          <a:ln xmlns:a="http://schemas.openxmlformats.org/drawingml/2006/main" w="0">
+            <a:noFill/>
+          </a:ln>
+        </p:spPr>
+        <p:txBody>
+          <a:bodyPr xmlns:a="http://schemas.openxmlformats.org/drawingml/2006/main" lIns="0" tIns="0" rIns="0" bIns="0" anchor="t">
+            <a:noAutofit/>
+          </a:bodyPr>
+          <a:lstStyle xmlns:a="http://schemas.openxmlformats.org/drawingml/2006/main"/>
+          <a:p xmlns:a="http://schemas.openxmlformats.org/drawingml/2006/main">
+            <a:pPr>
+              <a:defRPr sz="1725" b="1">
+                <a:solidFill>
+                  <a:srgbClr val="263C3A"/>
+                </a:solidFill>
+                <a:latin typeface="DejaVu Sans"/>
+                <a:ea typeface="DejaVu Sans"/>
+                <a:cs typeface="DejaVu Sans"/>
+              </a:defRPr>
+            </a:pPr>
+            <a:r>
+              <a:rPr sz="1725" b="1">
+                <a:solidFill>
+                  <a:srgbClr val="263C3A"/>
+                </a:solidFill>
+                <a:latin typeface="DejaVu Sans"/>
+                <a:ea typeface="DejaVu Sans"/>
+                <a:cs typeface="DejaVu Sans"/>
+              </a:rPr>
+              <a:t>Learner 2</a:t>
+            </a:r>
+          </a:p>
+        </p:txBody>
+      </p:sp>
+      <p:sp>
+        <p:nvSpPr>
+          <p:cNvPr id="15" name="">
+            <a:extLst xmlns:a="http://schemas.openxmlformats.org/drawingml/2006/main">
+              <a:ext uri="{FF2B5EF4-FFF2-40B4-BE49-F238E27FC236}">
+                <a16:creationId xmlns:a16="http://schemas.microsoft.com/office/drawing/2014/main" id="{93191020-2732-4921-B6DC-D8D4ECF423DE}"/>
+              </a:ext>
+            </a:extLst>
+          </p:cNvPr>
+          <p:cNvSpPr>
+            <a:spLocks xmlns:a="http://schemas.openxmlformats.org/drawingml/2006/main" noGrp="1"/>
+          </p:cNvSpPr>
+          <p:nvPr/>
+        </p:nvSpPr>
+        <p:spPr>
+          <a:xfrm xmlns:a="http://schemas.openxmlformats.org/drawingml/2006/main">
+            <a:off x="6391275" y="2990850"/>
+            <a:ext cx="4981575" cy="438150"/>
+          </a:xfrm>
+          <a:prstGeom xmlns:a="http://schemas.openxmlformats.org/drawingml/2006/main" prst="rect">
+            <a:avLst/>
+          </a:prstGeom>
+          <a:noFill xmlns:a="http://schemas.openxmlformats.org/drawingml/2006/main"/>
+          <a:ln xmlns:a="http://schemas.openxmlformats.org/drawingml/2006/main" w="0">
+            <a:noFill/>
+          </a:ln>
+        </p:spPr>
+        <p:txBody>
+          <a:bodyPr xmlns:a="http://schemas.openxmlformats.org/drawingml/2006/main" lIns="0" tIns="0" rIns="0" bIns="0" anchor="t">
             <a:noAutofit/>
           </a:bodyPr>
           <a:lstStyle xmlns:a="http://schemas.openxmlformats.org/drawingml/2006/main"/>
@@ -3142,44 +3529,21 @@
             <a:pPr>
               <a:defRPr sz="1950" b="0">
                 <a:solidFill>
-                  <a:srgbClr val="42473D"/>
+                  <a:srgbClr val="687572"/>
                 </a:solidFill>
-                <a:latin typeface="Arial"/>
-                <a:ea typeface="Arial"/>
-                <a:cs typeface="Arial"/>
+                <a:latin typeface="DejaVu Sans"/>
+                <a:ea typeface="DejaVu Sans"/>
+                <a:cs typeface="DejaVu Sans"/>
               </a:defRPr>
             </a:pPr>
             <a:r>
               <a:rPr sz="1950" b="0">
                 <a:solidFill>
-                  <a:srgbClr val="42473D"/>
+                  <a:srgbClr val="687572"/>
                 </a:solidFill>
-                <a:latin typeface="Arial"/>
-                <a:ea typeface="Arial"/>
-                <a:cs typeface="Arial"/>
-              </a:rPr>
-              <a:t>Learner 2</a:t>
-            </a:r>
-          </a:p>
-          <a:p xmlns:a="http://schemas.openxmlformats.org/drawingml/2006/main">
-            <a:pPr>
-              <a:defRPr sz="1950" b="0">
-                <a:solidFill>
-                  <a:srgbClr val="42473D"/>
-                </a:solidFill>
-                <a:latin typeface="Arial"/>
-                <a:ea typeface="Arial"/>
-                <a:cs typeface="Arial"/>
-              </a:defRPr>
-            </a:pPr>
-            <a:r>
-              <a:rPr sz="1950" b="0">
-                <a:solidFill>
-                  <a:srgbClr val="42473D"/>
-                </a:solidFill>
-                <a:latin typeface="Arial"/>
-                <a:ea typeface="Arial"/>
-                <a:cs typeface="Arial"/>
+                <a:latin typeface="DejaVu Sans"/>
+                <a:ea typeface="DejaVu Sans"/>
+                <a:cs typeface="DejaVu Sans"/>
               </a:rPr>
               <a:t>Independent recall</a:t>
             </a:r>
@@ -3188,10 +3552,10 @@
       </p:sp>
       <p:sp>
         <p:nvSpPr>
-          <p:cNvPr id="6" name="">
+          <p:cNvPr id="16" name="">
             <a:extLst xmlns:a="http://schemas.openxmlformats.org/drawingml/2006/main">
               <a:ext uri="{FF2B5EF4-FFF2-40B4-BE49-F238E27FC236}">
-                <a16:creationId xmlns:a16="http://schemas.microsoft.com/office/drawing/2014/main" id="{A3D09B1D-D129-45A2-B0D9-D3F034D68C6A}"/>
+                <a16:creationId xmlns:a16="http://schemas.microsoft.com/office/drawing/2014/main" id="{B5D02CDC-FC0C-4965-8E98-61CDA84F3A08}"/>
               </a:ext>
             </a:extLst>
           </p:cNvPr>
@@ -3202,21 +3566,195 @@
         </p:nvSpPr>
         <p:spPr>
           <a:xfrm xmlns:a="http://schemas.openxmlformats.org/drawingml/2006/main">
-            <a:off x="609600" y="3657600"/>
-            <a:ext cx="5400675" cy="1295400"/>
+            <a:off x="609600" y="3762375"/>
+            <a:ext cx="5400675" cy="1343025"/>
           </a:xfrm>
           <a:prstGeom xmlns:a="http://schemas.openxmlformats.org/drawingml/2006/main" prst="rect">
             <a:avLst/>
           </a:prstGeom>
-          <a:noFill xmlns:a="http://schemas.openxmlformats.org/drawingml/2006/main"/>
+          <a:solidFill xmlns:a="http://schemas.openxmlformats.org/drawingml/2006/main">
+            <a:srgbClr val="EDF2F5"/>
+          </a:solidFill>
           <a:ln xmlns:a="http://schemas.openxmlformats.org/drawingml/2006/main" w="9525">
             <a:solidFill>
-              <a:srgbClr val="CBD0C4"/>
+              <a:srgbClr val="D4DFDB"/>
             </a:solidFill>
           </a:ln>
         </p:spPr>
+      </p:sp>
+      <p:sp>
+        <p:nvSpPr>
+          <p:cNvPr id="17" name="">
+            <a:extLst xmlns:a="http://schemas.openxmlformats.org/drawingml/2006/main">
+              <a:ext uri="{FF2B5EF4-FFF2-40B4-BE49-F238E27FC236}">
+                <a16:creationId xmlns:a16="http://schemas.microsoft.com/office/drawing/2014/main" id="{66EEA8CF-023C-4E76-B677-3FCCACAD28E9}"/>
+              </a:ext>
+            </a:extLst>
+          </p:cNvPr>
+          <p:cNvSpPr>
+            <a:spLocks xmlns:a="http://schemas.openxmlformats.org/drawingml/2006/main" noGrp="1"/>
+          </p:cNvSpPr>
+          <p:nvPr/>
+        </p:nvSpPr>
+        <p:spPr>
+          <a:xfrm xmlns:a="http://schemas.openxmlformats.org/drawingml/2006/main">
+            <a:off x="800100" y="3933825"/>
+            <a:ext cx="381000" cy="381000"/>
+          </a:xfrm>
+          <a:prstGeom xmlns:a="http://schemas.openxmlformats.org/drawingml/2006/main" prst="ellipse">
+            <a:avLst/>
+          </a:prstGeom>
+          <a:solidFill xmlns:a="http://schemas.openxmlformats.org/drawingml/2006/main">
+            <a:srgbClr val="FFFFFF"/>
+          </a:solidFill>
+          <a:ln xmlns:a="http://schemas.openxmlformats.org/drawingml/2006/main" w="0">
+            <a:noFill/>
+          </a:ln>
+        </p:spPr>
+      </p:sp>
+      <p:sp>
+        <p:nvSpPr>
+          <p:cNvPr id="18" name="">
+            <a:extLst xmlns:a="http://schemas.openxmlformats.org/drawingml/2006/main">
+              <a:ext uri="{FF2B5EF4-FFF2-40B4-BE49-F238E27FC236}">
+                <a16:creationId xmlns:a16="http://schemas.microsoft.com/office/drawing/2014/main" id="{2B0FB586-4627-4E54-AF6F-CD55A34842AE}"/>
+              </a:ext>
+            </a:extLst>
+          </p:cNvPr>
+          <p:cNvSpPr>
+            <a:spLocks xmlns:a="http://schemas.openxmlformats.org/drawingml/2006/main" noGrp="1"/>
+          </p:cNvSpPr>
+          <p:nvPr/>
+        </p:nvSpPr>
+        <p:spPr>
+          <a:xfrm xmlns:a="http://schemas.openxmlformats.org/drawingml/2006/main">
+            <a:off x="857250" y="4000500"/>
+            <a:ext cx="342900" cy="285750"/>
+          </a:xfrm>
+          <a:prstGeom xmlns:a="http://schemas.openxmlformats.org/drawingml/2006/main" prst="rect">
+            <a:avLst/>
+          </a:prstGeom>
+          <a:noFill xmlns:a="http://schemas.openxmlformats.org/drawingml/2006/main"/>
+          <a:ln xmlns:a="http://schemas.openxmlformats.org/drawingml/2006/main" w="0">
+            <a:noFill/>
+          </a:ln>
+        </p:spPr>
         <p:txBody>
-          <a:bodyPr xmlns:a="http://schemas.openxmlformats.org/drawingml/2006/main" lIns="142875" tIns="114300" rIns="142875" bIns="0" anchor="t">
+          <a:bodyPr xmlns:a="http://schemas.openxmlformats.org/drawingml/2006/main" lIns="0" tIns="0" rIns="0" bIns="0" anchor="t">
+            <a:noAutofit/>
+          </a:bodyPr>
+          <a:lstStyle xmlns:a="http://schemas.openxmlformats.org/drawingml/2006/main"/>
+          <a:p xmlns:a="http://schemas.openxmlformats.org/drawingml/2006/main">
+            <a:pPr>
+              <a:defRPr sz="1350" b="1">
+                <a:solidFill>
+                  <a:srgbClr val="263C3A"/>
+                </a:solidFill>
+                <a:latin typeface="DejaVu Sans"/>
+                <a:ea typeface="DejaVu Sans"/>
+                <a:cs typeface="DejaVu Sans"/>
+              </a:defRPr>
+            </a:pPr>
+            <a:r>
+              <a:rPr sz="1350" b="1">
+                <a:solidFill>
+                  <a:srgbClr val="263C3A"/>
+                </a:solidFill>
+                <a:latin typeface="DejaVu Sans"/>
+                <a:ea typeface="DejaVu Sans"/>
+                <a:cs typeface="DejaVu Sans"/>
+              </a:rPr>
+              <a:t>03</a:t>
+            </a:r>
+          </a:p>
+        </p:txBody>
+      </p:sp>
+      <p:sp>
+        <p:nvSpPr>
+          <p:cNvPr id="19" name="">
+            <a:extLst xmlns:a="http://schemas.openxmlformats.org/drawingml/2006/main">
+              <a:ext uri="{FF2B5EF4-FFF2-40B4-BE49-F238E27FC236}">
+                <a16:creationId xmlns:a16="http://schemas.microsoft.com/office/drawing/2014/main" id="{A291916F-E3BE-4354-8B50-CA80E75A82AF}"/>
+              </a:ext>
+            </a:extLst>
+          </p:cNvPr>
+          <p:cNvSpPr>
+            <a:spLocks xmlns:a="http://schemas.openxmlformats.org/drawingml/2006/main" noGrp="1"/>
+          </p:cNvSpPr>
+          <p:nvPr/>
+        </p:nvSpPr>
+        <p:spPr>
+          <a:xfrm xmlns:a="http://schemas.openxmlformats.org/drawingml/2006/main">
+            <a:off x="1352550" y="3981450"/>
+            <a:ext cx="4467225" cy="428625"/>
+          </a:xfrm>
+          <a:prstGeom xmlns:a="http://schemas.openxmlformats.org/drawingml/2006/main" prst="rect">
+            <a:avLst/>
+          </a:prstGeom>
+          <a:noFill xmlns:a="http://schemas.openxmlformats.org/drawingml/2006/main"/>
+          <a:ln xmlns:a="http://schemas.openxmlformats.org/drawingml/2006/main" w="0">
+            <a:noFill/>
+          </a:ln>
+        </p:spPr>
+        <p:txBody>
+          <a:bodyPr xmlns:a="http://schemas.openxmlformats.org/drawingml/2006/main" lIns="0" tIns="0" rIns="0" bIns="0" anchor="t">
+            <a:noAutofit/>
+          </a:bodyPr>
+          <a:lstStyle xmlns:a="http://schemas.openxmlformats.org/drawingml/2006/main"/>
+          <a:p xmlns:a="http://schemas.openxmlformats.org/drawingml/2006/main">
+            <a:pPr>
+              <a:defRPr sz="1725" b="1">
+                <a:solidFill>
+                  <a:srgbClr val="263C3A"/>
+                </a:solidFill>
+                <a:latin typeface="DejaVu Sans"/>
+                <a:ea typeface="DejaVu Sans"/>
+                <a:cs typeface="DejaVu Sans"/>
+              </a:defRPr>
+            </a:pPr>
+            <a:r>
+              <a:rPr sz="1725" b="1">
+                <a:solidFill>
+                  <a:srgbClr val="263C3A"/>
+                </a:solidFill>
+                <a:latin typeface="DejaVu Sans"/>
+                <a:ea typeface="DejaVu Sans"/>
+                <a:cs typeface="DejaVu Sans"/>
+              </a:rPr>
+              <a:t>Learner 3</a:t>
+            </a:r>
+          </a:p>
+        </p:txBody>
+      </p:sp>
+      <p:sp>
+        <p:nvSpPr>
+          <p:cNvPr id="20" name="">
+            <a:extLst xmlns:a="http://schemas.openxmlformats.org/drawingml/2006/main">
+              <a:ext uri="{FF2B5EF4-FFF2-40B4-BE49-F238E27FC236}">
+                <a16:creationId xmlns:a16="http://schemas.microsoft.com/office/drawing/2014/main" id="{5892518E-9E1C-46DE-81BB-94DA70995ED2}"/>
+              </a:ext>
+            </a:extLst>
+          </p:cNvPr>
+          <p:cNvSpPr>
+            <a:spLocks xmlns:a="http://schemas.openxmlformats.org/drawingml/2006/main" noGrp="1"/>
+          </p:cNvSpPr>
+          <p:nvPr/>
+        </p:nvSpPr>
+        <p:spPr>
+          <a:xfrm xmlns:a="http://schemas.openxmlformats.org/drawingml/2006/main">
+            <a:off x="819150" y="4505325"/>
+            <a:ext cx="4981575" cy="438150"/>
+          </a:xfrm>
+          <a:prstGeom xmlns:a="http://schemas.openxmlformats.org/drawingml/2006/main" prst="rect">
+            <a:avLst/>
+          </a:prstGeom>
+          <a:noFill xmlns:a="http://schemas.openxmlformats.org/drawingml/2006/main"/>
+          <a:ln xmlns:a="http://schemas.openxmlformats.org/drawingml/2006/main" w="0">
+            <a:noFill/>
+          </a:ln>
+        </p:spPr>
+        <p:txBody>
+          <a:bodyPr xmlns:a="http://schemas.openxmlformats.org/drawingml/2006/main" lIns="0" tIns="0" rIns="0" bIns="0" anchor="t">
             <a:noAutofit/>
           </a:bodyPr>
           <a:lstStyle xmlns:a="http://schemas.openxmlformats.org/drawingml/2006/main"/>
@@ -3224,44 +3762,21 @@
             <a:pPr>
               <a:defRPr sz="1950" b="0">
                 <a:solidFill>
-                  <a:srgbClr val="42473D"/>
+                  <a:srgbClr val="687572"/>
                 </a:solidFill>
-                <a:latin typeface="Arial"/>
-                <a:ea typeface="Arial"/>
-                <a:cs typeface="Arial"/>
+                <a:latin typeface="DejaVu Sans"/>
+                <a:ea typeface="DejaVu Sans"/>
+                <a:cs typeface="DejaVu Sans"/>
               </a:defRPr>
             </a:pPr>
             <a:r>
               <a:rPr sz="1950" b="0">
                 <a:solidFill>
-                  <a:srgbClr val="42473D"/>
+                  <a:srgbClr val="687572"/>
                 </a:solidFill>
-                <a:latin typeface="Arial"/>
-                <a:ea typeface="Arial"/>
-                <a:cs typeface="Arial"/>
-              </a:rPr>
-              <a:t>Learner 3</a:t>
-            </a:r>
-          </a:p>
-          <a:p xmlns:a="http://schemas.openxmlformats.org/drawingml/2006/main">
-            <a:pPr>
-              <a:defRPr sz="1950" b="0">
-                <a:solidFill>
-                  <a:srgbClr val="42473D"/>
-                </a:solidFill>
-                <a:latin typeface="Arial"/>
-                <a:ea typeface="Arial"/>
-                <a:cs typeface="Arial"/>
-              </a:defRPr>
-            </a:pPr>
-            <a:r>
-              <a:rPr sz="1950" b="0">
-                <a:solidFill>
-                  <a:srgbClr val="42473D"/>
-                </a:solidFill>
-                <a:latin typeface="Arial"/>
-                <a:ea typeface="Arial"/>
-                <a:cs typeface="Arial"/>
+                <a:latin typeface="DejaVu Sans"/>
+                <a:ea typeface="DejaVu Sans"/>
+                <a:cs typeface="DejaVu Sans"/>
               </a:rPr>
               <a:t>Independent recall</a:t>
             </a:r>
@@ -3270,10 +3785,10 @@
       </p:sp>
       <p:sp>
         <p:nvSpPr>
-          <p:cNvPr id="7" name="">
+          <p:cNvPr id="21" name="">
             <a:extLst xmlns:a="http://schemas.openxmlformats.org/drawingml/2006/main">
               <a:ext uri="{FF2B5EF4-FFF2-40B4-BE49-F238E27FC236}">
-                <a16:creationId xmlns:a16="http://schemas.microsoft.com/office/drawing/2014/main" id="{778CA6A1-5A90-4E71-84ED-E51C18475476}"/>
+                <a16:creationId xmlns:a16="http://schemas.microsoft.com/office/drawing/2014/main" id="{D23B6AC8-7BBC-4571-ABDF-35C11BE65178}"/>
               </a:ext>
             </a:extLst>
           </p:cNvPr>
@@ -3284,21 +3799,195 @@
         </p:nvSpPr>
         <p:spPr>
           <a:xfrm xmlns:a="http://schemas.openxmlformats.org/drawingml/2006/main">
-            <a:off x="6181725" y="3657600"/>
-            <a:ext cx="5400675" cy="1295400"/>
+            <a:off x="6181725" y="3762375"/>
+            <a:ext cx="5400675" cy="1343025"/>
           </a:xfrm>
           <a:prstGeom xmlns:a="http://schemas.openxmlformats.org/drawingml/2006/main" prst="rect">
             <a:avLst/>
           </a:prstGeom>
-          <a:noFill xmlns:a="http://schemas.openxmlformats.org/drawingml/2006/main"/>
+          <a:solidFill xmlns:a="http://schemas.openxmlformats.org/drawingml/2006/main">
+            <a:srgbClr val="EAF1EC"/>
+          </a:solidFill>
           <a:ln xmlns:a="http://schemas.openxmlformats.org/drawingml/2006/main" w="9525">
             <a:solidFill>
-              <a:srgbClr val="CBD0C4"/>
+              <a:srgbClr val="D4DFDB"/>
             </a:solidFill>
           </a:ln>
         </p:spPr>
+      </p:sp>
+      <p:sp>
+        <p:nvSpPr>
+          <p:cNvPr id="22" name="">
+            <a:extLst xmlns:a="http://schemas.openxmlformats.org/drawingml/2006/main">
+              <a:ext uri="{FF2B5EF4-FFF2-40B4-BE49-F238E27FC236}">
+                <a16:creationId xmlns:a16="http://schemas.microsoft.com/office/drawing/2014/main" id="{A569A40D-F36C-4245-BC9D-0027F2044CC0}"/>
+              </a:ext>
+            </a:extLst>
+          </p:cNvPr>
+          <p:cNvSpPr>
+            <a:spLocks xmlns:a="http://schemas.openxmlformats.org/drawingml/2006/main" noGrp="1"/>
+          </p:cNvSpPr>
+          <p:nvPr/>
+        </p:nvSpPr>
+        <p:spPr>
+          <a:xfrm xmlns:a="http://schemas.openxmlformats.org/drawingml/2006/main">
+            <a:off x="6372225" y="3933825"/>
+            <a:ext cx="381000" cy="381000"/>
+          </a:xfrm>
+          <a:prstGeom xmlns:a="http://schemas.openxmlformats.org/drawingml/2006/main" prst="ellipse">
+            <a:avLst/>
+          </a:prstGeom>
+          <a:solidFill xmlns:a="http://schemas.openxmlformats.org/drawingml/2006/main">
+            <a:srgbClr val="FFFFFF"/>
+          </a:solidFill>
+          <a:ln xmlns:a="http://schemas.openxmlformats.org/drawingml/2006/main" w="0">
+            <a:noFill/>
+          </a:ln>
+        </p:spPr>
+      </p:sp>
+      <p:sp>
+        <p:nvSpPr>
+          <p:cNvPr id="23" name="">
+            <a:extLst xmlns:a="http://schemas.openxmlformats.org/drawingml/2006/main">
+              <a:ext uri="{FF2B5EF4-FFF2-40B4-BE49-F238E27FC236}">
+                <a16:creationId xmlns:a16="http://schemas.microsoft.com/office/drawing/2014/main" id="{6D70FE1B-220E-43C4-A3C4-8C9308D66366}"/>
+              </a:ext>
+            </a:extLst>
+          </p:cNvPr>
+          <p:cNvSpPr>
+            <a:spLocks xmlns:a="http://schemas.openxmlformats.org/drawingml/2006/main" noGrp="1"/>
+          </p:cNvSpPr>
+          <p:nvPr/>
+        </p:nvSpPr>
+        <p:spPr>
+          <a:xfrm xmlns:a="http://schemas.openxmlformats.org/drawingml/2006/main">
+            <a:off x="6429375" y="4000500"/>
+            <a:ext cx="342900" cy="285750"/>
+          </a:xfrm>
+          <a:prstGeom xmlns:a="http://schemas.openxmlformats.org/drawingml/2006/main" prst="rect">
+            <a:avLst/>
+          </a:prstGeom>
+          <a:noFill xmlns:a="http://schemas.openxmlformats.org/drawingml/2006/main"/>
+          <a:ln xmlns:a="http://schemas.openxmlformats.org/drawingml/2006/main" w="0">
+            <a:noFill/>
+          </a:ln>
+        </p:spPr>
         <p:txBody>
-          <a:bodyPr xmlns:a="http://schemas.openxmlformats.org/drawingml/2006/main" lIns="142875" tIns="114300" rIns="142875" bIns="0" anchor="t">
+          <a:bodyPr xmlns:a="http://schemas.openxmlformats.org/drawingml/2006/main" lIns="0" tIns="0" rIns="0" bIns="0" anchor="t">
+            <a:noAutofit/>
+          </a:bodyPr>
+          <a:lstStyle xmlns:a="http://schemas.openxmlformats.org/drawingml/2006/main"/>
+          <a:p xmlns:a="http://schemas.openxmlformats.org/drawingml/2006/main">
+            <a:pPr>
+              <a:defRPr sz="1350" b="1">
+                <a:solidFill>
+                  <a:srgbClr val="263C3A"/>
+                </a:solidFill>
+                <a:latin typeface="DejaVu Sans"/>
+                <a:ea typeface="DejaVu Sans"/>
+                <a:cs typeface="DejaVu Sans"/>
+              </a:defRPr>
+            </a:pPr>
+            <a:r>
+              <a:rPr sz="1350" b="1">
+                <a:solidFill>
+                  <a:srgbClr val="263C3A"/>
+                </a:solidFill>
+                <a:latin typeface="DejaVu Sans"/>
+                <a:ea typeface="DejaVu Sans"/>
+                <a:cs typeface="DejaVu Sans"/>
+              </a:rPr>
+              <a:t>04</a:t>
+            </a:r>
+          </a:p>
+        </p:txBody>
+      </p:sp>
+      <p:sp>
+        <p:nvSpPr>
+          <p:cNvPr id="24" name="">
+            <a:extLst xmlns:a="http://schemas.openxmlformats.org/drawingml/2006/main">
+              <a:ext uri="{FF2B5EF4-FFF2-40B4-BE49-F238E27FC236}">
+                <a16:creationId xmlns:a16="http://schemas.microsoft.com/office/drawing/2014/main" id="{84B0B9B2-86C3-4B86-A484-B3B4AA18DB8C}"/>
+              </a:ext>
+            </a:extLst>
+          </p:cNvPr>
+          <p:cNvSpPr>
+            <a:spLocks xmlns:a="http://schemas.openxmlformats.org/drawingml/2006/main" noGrp="1"/>
+          </p:cNvSpPr>
+          <p:nvPr/>
+        </p:nvSpPr>
+        <p:spPr>
+          <a:xfrm xmlns:a="http://schemas.openxmlformats.org/drawingml/2006/main">
+            <a:off x="6924675" y="3981450"/>
+            <a:ext cx="4467225" cy="428625"/>
+          </a:xfrm>
+          <a:prstGeom xmlns:a="http://schemas.openxmlformats.org/drawingml/2006/main" prst="rect">
+            <a:avLst/>
+          </a:prstGeom>
+          <a:noFill xmlns:a="http://schemas.openxmlformats.org/drawingml/2006/main"/>
+          <a:ln xmlns:a="http://schemas.openxmlformats.org/drawingml/2006/main" w="0">
+            <a:noFill/>
+          </a:ln>
+        </p:spPr>
+        <p:txBody>
+          <a:bodyPr xmlns:a="http://schemas.openxmlformats.org/drawingml/2006/main" lIns="0" tIns="0" rIns="0" bIns="0" anchor="t">
+            <a:noAutofit/>
+          </a:bodyPr>
+          <a:lstStyle xmlns:a="http://schemas.openxmlformats.org/drawingml/2006/main"/>
+          <a:p xmlns:a="http://schemas.openxmlformats.org/drawingml/2006/main">
+            <a:pPr>
+              <a:defRPr sz="1725" b="1">
+                <a:solidFill>
+                  <a:srgbClr val="263C3A"/>
+                </a:solidFill>
+                <a:latin typeface="DejaVu Sans"/>
+                <a:ea typeface="DejaVu Sans"/>
+                <a:cs typeface="DejaVu Sans"/>
+              </a:defRPr>
+            </a:pPr>
+            <a:r>
+              <a:rPr sz="1725" b="1">
+                <a:solidFill>
+                  <a:srgbClr val="263C3A"/>
+                </a:solidFill>
+                <a:latin typeface="DejaVu Sans"/>
+                <a:ea typeface="DejaVu Sans"/>
+                <a:cs typeface="DejaVu Sans"/>
+              </a:rPr>
+              <a:t>Learner 4</a:t>
+            </a:r>
+          </a:p>
+        </p:txBody>
+      </p:sp>
+      <p:sp>
+        <p:nvSpPr>
+          <p:cNvPr id="25" name="">
+            <a:extLst xmlns:a="http://schemas.openxmlformats.org/drawingml/2006/main">
+              <a:ext uri="{FF2B5EF4-FFF2-40B4-BE49-F238E27FC236}">
+                <a16:creationId xmlns:a16="http://schemas.microsoft.com/office/drawing/2014/main" id="{CE587D14-5923-4DAB-AD80-1FECC80AF245}"/>
+              </a:ext>
+            </a:extLst>
+          </p:cNvPr>
+          <p:cNvSpPr>
+            <a:spLocks xmlns:a="http://schemas.openxmlformats.org/drawingml/2006/main" noGrp="1"/>
+          </p:cNvSpPr>
+          <p:nvPr/>
+        </p:nvSpPr>
+        <p:spPr>
+          <a:xfrm xmlns:a="http://schemas.openxmlformats.org/drawingml/2006/main">
+            <a:off x="6391275" y="4505325"/>
+            <a:ext cx="4981575" cy="438150"/>
+          </a:xfrm>
+          <a:prstGeom xmlns:a="http://schemas.openxmlformats.org/drawingml/2006/main" prst="rect">
+            <a:avLst/>
+          </a:prstGeom>
+          <a:noFill xmlns:a="http://schemas.openxmlformats.org/drawingml/2006/main"/>
+          <a:ln xmlns:a="http://schemas.openxmlformats.org/drawingml/2006/main" w="0">
+            <a:noFill/>
+          </a:ln>
+        </p:spPr>
+        <p:txBody>
+          <a:bodyPr xmlns:a="http://schemas.openxmlformats.org/drawingml/2006/main" lIns="0" tIns="0" rIns="0" bIns="0" anchor="t">
             <a:noAutofit/>
           </a:bodyPr>
           <a:lstStyle xmlns:a="http://schemas.openxmlformats.org/drawingml/2006/main"/>
@@ -3306,44 +3995,21 @@
             <a:pPr>
               <a:defRPr sz="1950" b="0">
                 <a:solidFill>
-                  <a:srgbClr val="42473D"/>
+                  <a:srgbClr val="687572"/>
                 </a:solidFill>
-                <a:latin typeface="Arial"/>
-                <a:ea typeface="Arial"/>
-                <a:cs typeface="Arial"/>
+                <a:latin typeface="DejaVu Sans"/>
+                <a:ea typeface="DejaVu Sans"/>
+                <a:cs typeface="DejaVu Sans"/>
               </a:defRPr>
             </a:pPr>
             <a:r>
               <a:rPr sz="1950" b="0">
                 <a:solidFill>
-                  <a:srgbClr val="42473D"/>
+                  <a:srgbClr val="687572"/>
                 </a:solidFill>
-                <a:latin typeface="Arial"/>
-                <a:ea typeface="Arial"/>
-                <a:cs typeface="Arial"/>
-              </a:rPr>
-              <a:t>Learner 4</a:t>
-            </a:r>
-          </a:p>
-          <a:p xmlns:a="http://schemas.openxmlformats.org/drawingml/2006/main">
-            <a:pPr>
-              <a:defRPr sz="1950" b="0">
-                <a:solidFill>
-                  <a:srgbClr val="42473D"/>
-                </a:solidFill>
-                <a:latin typeface="Arial"/>
-                <a:ea typeface="Arial"/>
-                <a:cs typeface="Arial"/>
-              </a:defRPr>
-            </a:pPr>
-            <a:r>
-              <a:rPr sz="1950" b="0">
-                <a:solidFill>
-                  <a:srgbClr val="42473D"/>
-                </a:solidFill>
-                <a:latin typeface="Arial"/>
-                <a:ea typeface="Arial"/>
-                <a:cs typeface="Arial"/>
+                <a:latin typeface="DejaVu Sans"/>
+                <a:ea typeface="DejaVu Sans"/>
+                <a:cs typeface="DejaVu Sans"/>
               </a:rPr>
               <a:t>Independent recall</a:t>
             </a:r>
@@ -3352,10 +4018,10 @@
       </p:sp>
       <p:sp>
         <p:nvSpPr>
-          <p:cNvPr id="8" name="">
+          <p:cNvPr id="26" name="">
             <a:extLst xmlns:a="http://schemas.openxmlformats.org/drawingml/2006/main">
               <a:ext uri="{FF2B5EF4-FFF2-40B4-BE49-F238E27FC236}">
-                <a16:creationId xmlns:a16="http://schemas.microsoft.com/office/drawing/2014/main" id="{305F1E0A-6A98-427C-A3E2-5A674311AFB6}"/>
+                <a16:creationId xmlns:a16="http://schemas.microsoft.com/office/drawing/2014/main" id="{29CB8BFC-5286-4900-A7A5-AC7DD9F7BFAE}"/>
               </a:ext>
             </a:extLst>
           </p:cNvPr>
@@ -3366,55 +4032,26 @@
         </p:nvSpPr>
         <p:spPr>
           <a:xfrm xmlns:a="http://schemas.openxmlformats.org/drawingml/2006/main">
-            <a:off x="609600" y="5219700"/>
-            <a:ext cx="10972800" cy="533400"/>
+            <a:off x="609600" y="5276850"/>
+            <a:ext cx="10972800" cy="438150"/>
           </a:xfrm>
           <a:prstGeom xmlns:a="http://schemas.openxmlformats.org/drawingml/2006/main" prst="rect">
             <a:avLst/>
           </a:prstGeom>
-          <a:noFill xmlns:a="http://schemas.openxmlformats.org/drawingml/2006/main"/>
-          <a:ln xmlns:a="http://schemas.openxmlformats.org/drawingml/2006/main" w="9525">
-            <a:solidFill>
-              <a:srgbClr val="CBD0C4"/>
-            </a:solidFill>
+          <a:solidFill xmlns:a="http://schemas.openxmlformats.org/drawingml/2006/main">
+            <a:srgbClr val="F5EBCF"/>
+          </a:solidFill>
+          <a:ln xmlns:a="http://schemas.openxmlformats.org/drawingml/2006/main" w="0">
+            <a:noFill/>
           </a:ln>
         </p:spPr>
-        <p:txBody>
-          <a:bodyPr xmlns:a="http://schemas.openxmlformats.org/drawingml/2006/main" lIns="142875" tIns="114300" rIns="142875" bIns="0" anchor="t">
-            <a:noAutofit/>
-          </a:bodyPr>
-          <a:lstStyle xmlns:a="http://schemas.openxmlformats.org/drawingml/2006/main"/>
-          <a:p xmlns:a="http://schemas.openxmlformats.org/drawingml/2006/main">
-            <a:pPr>
-              <a:defRPr sz="1875" b="0">
-                <a:solidFill>
-                  <a:srgbClr val="42473D"/>
-                </a:solidFill>
-                <a:latin typeface="Arial"/>
-                <a:ea typeface="Arial"/>
-                <a:cs typeface="Arial"/>
-              </a:defRPr>
-            </a:pPr>
-            <a:r>
-              <a:rPr sz="1875" b="0">
-                <a:solidFill>
-                  <a:srgbClr val="42473D"/>
-                </a:solidFill>
-                <a:latin typeface="Arial"/>
-                <a:ea typeface="Arial"/>
-                <a:cs typeface="Arial"/>
-              </a:rPr>
-              <a:t>Shared ideas after discussion: [Add your instructions]</a:t>
-            </a:r>
-          </a:p>
-        </p:txBody>
-      </p:sp>
-      <p:sp>
-        <p:nvSpPr>
-          <p:cNvPr id="9" name="">
+      </p:sp>
+      <p:sp>
+        <p:nvSpPr>
+          <p:cNvPr id="27" name="">
             <a:extLst xmlns:a="http://schemas.openxmlformats.org/drawingml/2006/main">
               <a:ext uri="{FF2B5EF4-FFF2-40B4-BE49-F238E27FC236}">
-                <a16:creationId xmlns:a16="http://schemas.microsoft.com/office/drawing/2014/main" id="{76551DDD-64BC-452A-BAE8-9DC4020DD322}"/>
+                <a16:creationId xmlns:a16="http://schemas.microsoft.com/office/drawing/2014/main" id="{E3D3366E-2579-4B77-803A-62C8E9AC65E8}"/>
               </a:ext>
             </a:extLst>
           </p:cNvPr>
@@ -3425,8 +4062,8 @@
         </p:nvSpPr>
         <p:spPr>
           <a:xfrm xmlns:a="http://schemas.openxmlformats.org/drawingml/2006/main">
-            <a:off x="609600" y="5953125"/>
-            <a:ext cx="10972800" cy="381000"/>
+            <a:off x="781050" y="5362575"/>
+            <a:ext cx="10629900" cy="304800"/>
           </a:xfrm>
           <a:prstGeom xmlns:a="http://schemas.openxmlformats.org/drawingml/2006/main" prst="rect">
             <a:avLst/>
@@ -3443,35 +4080,35 @@
           <a:lstStyle xmlns:a="http://schemas.openxmlformats.org/drawingml/2006/main"/>
           <a:p xmlns:a="http://schemas.openxmlformats.org/drawingml/2006/main">
             <a:pPr>
-              <a:defRPr sz="1800" b="0">
+              <a:defRPr sz="1575" b="0">
                 <a:solidFill>
-                  <a:srgbClr val="28534A"/>
+                  <a:srgbClr val="263C3A"/>
                 </a:solidFill>
-                <a:latin typeface="Arial"/>
-                <a:ea typeface="Arial"/>
-                <a:cs typeface="Arial"/>
+                <a:latin typeface="DejaVu Sans"/>
+                <a:ea typeface="DejaVu Sans"/>
+                <a:cs typeface="DejaVu Sans"/>
               </a:defRPr>
             </a:pPr>
             <a:r>
-              <a:rPr sz="1800" b="0">
+              <a:rPr sz="1575" b="0">
                 <a:solidFill>
-                  <a:srgbClr val="28534A"/>
+                  <a:srgbClr val="263C3A"/>
                 </a:solidFill>
-                <a:latin typeface="Arial"/>
-                <a:ea typeface="Arial"/>
-                <a:cs typeface="Arial"/>
+                <a:latin typeface="DejaVu Sans"/>
+                <a:ea typeface="DejaVu Sans"/>
+                <a:cs typeface="DejaVu Sans"/>
               </a:rPr>
-              <a:t>Time: [Add minutes]     Check: [Add your feedback routine]</a:t>
+              <a:t>Shared ideas after discussion: [Your instructions]</a:t>
             </a:r>
           </a:p>
         </p:txBody>
       </p:sp>
       <p:sp>
         <p:nvSpPr>
-          <p:cNvPr id="10" name="">
+          <p:cNvPr id="28" name="">
             <a:extLst xmlns:a="http://schemas.openxmlformats.org/drawingml/2006/main">
               <a:ext uri="{FF2B5EF4-FFF2-40B4-BE49-F238E27FC236}">
-                <a16:creationId xmlns:a16="http://schemas.microsoft.com/office/drawing/2014/main" id="{3454C172-3F32-40E3-85E9-434255EFC068}"/>
+                <a16:creationId xmlns:a16="http://schemas.microsoft.com/office/drawing/2014/main" id="{DADFC702-7A04-412C-8537-C8097B456933}"/>
               </a:ext>
             </a:extLst>
           </p:cNvPr>
@@ -3482,8 +4119,38 @@
         </p:nvSpPr>
         <p:spPr>
           <a:xfrm xmlns:a="http://schemas.openxmlformats.org/drawingml/2006/main">
-            <a:off x="609600" y="6534150"/>
-            <a:ext cx="10972800" cy="209550"/>
+            <a:off x="609600" y="5953125"/>
+            <a:ext cx="10972800" cy="9525"/>
+          </a:xfrm>
+          <a:prstGeom xmlns:a="http://schemas.openxmlformats.org/drawingml/2006/main" prst="rect">
+            <a:avLst/>
+          </a:prstGeom>
+          <a:solidFill xmlns:a="http://schemas.openxmlformats.org/drawingml/2006/main">
+            <a:srgbClr val="A9BDB7"/>
+          </a:solidFill>
+          <a:ln xmlns:a="http://schemas.openxmlformats.org/drawingml/2006/main" w="0">
+            <a:noFill/>
+          </a:ln>
+        </p:spPr>
+      </p:sp>
+      <p:sp>
+        <p:nvSpPr>
+          <p:cNvPr id="29" name="">
+            <a:extLst xmlns:a="http://schemas.openxmlformats.org/drawingml/2006/main">
+              <a:ext uri="{FF2B5EF4-FFF2-40B4-BE49-F238E27FC236}">
+                <a16:creationId xmlns:a16="http://schemas.microsoft.com/office/drawing/2014/main" id="{C7FD8830-5A6A-4B1A-A28E-628BF9ECD4E5}"/>
+              </a:ext>
+            </a:extLst>
+          </p:cNvPr>
+          <p:cNvSpPr>
+            <a:spLocks xmlns:a="http://schemas.openxmlformats.org/drawingml/2006/main" noGrp="1"/>
+          </p:cNvSpPr>
+          <p:nvPr/>
+        </p:nvSpPr>
+        <p:spPr>
+          <a:xfrm xmlns:a="http://schemas.openxmlformats.org/drawingml/2006/main">
+            <a:off x="609600" y="6191250"/>
+            <a:ext cx="3238500" cy="361950"/>
           </a:xfrm>
           <a:prstGeom xmlns:a="http://schemas.openxmlformats.org/drawingml/2006/main" prst="rect">
             <a:avLst/>
@@ -3500,33 +4167,90 @@
           <a:lstStyle xmlns:a="http://schemas.openxmlformats.org/drawingml/2006/main"/>
           <a:p xmlns:a="http://schemas.openxmlformats.org/drawingml/2006/main">
             <a:pPr>
-              <a:defRPr sz="1050" b="0">
+              <a:defRPr sz="1650" b="0">
                 <a:solidFill>
-                  <a:srgbClr val="62675C"/>
+                  <a:srgbClr val="687572"/>
                 </a:solidFill>
-                <a:latin typeface="Arial"/>
-                <a:ea typeface="Arial"/>
-                <a:cs typeface="Arial"/>
+                <a:latin typeface="DejaVu Sans"/>
+                <a:ea typeface="DejaVu Sans"/>
+                <a:cs typeface="DejaVu Sans"/>
               </a:defRPr>
             </a:pPr>
             <a:r>
-              <a:rPr sz="1050" b="0">
+              <a:rPr sz="1650" b="0">
                 <a:solidFill>
-                  <a:srgbClr val="62675C"/>
+                  <a:srgbClr val="687572"/>
                 </a:solidFill>
-                <a:latin typeface="Arial"/>
-                <a:ea typeface="Arial"/>
-                <a:cs typeface="Arial"/>
+                <a:latin typeface="DejaVu Sans"/>
+                <a:ea typeface="DejaVu Sans"/>
+                <a:cs typeface="DejaVu Sans"/>
               </a:rPr>
-              <a:t>TNT Teaching Tools   Editable classroom template   Source and teacher guidance in speaker notes</a:t>
+              <a:t>Time: [Minutes]</a:t>
             </a:r>
           </a:p>
         </p:txBody>
       </p:sp>
+      <p:sp>
+        <p:nvSpPr>
+          <p:cNvPr id="30" name="">
+            <a:extLst xmlns:a="http://schemas.openxmlformats.org/drawingml/2006/main">
+              <a:ext uri="{FF2B5EF4-FFF2-40B4-BE49-F238E27FC236}">
+                <a16:creationId xmlns:a16="http://schemas.microsoft.com/office/drawing/2014/main" id="{59037C5E-B10E-42FF-8617-CA82522D495E}"/>
+              </a:ext>
+            </a:extLst>
+          </p:cNvPr>
+          <p:cNvSpPr>
+            <a:spLocks xmlns:a="http://schemas.openxmlformats.org/drawingml/2006/main" noGrp="1"/>
+          </p:cNvSpPr>
+          <p:nvPr/>
+        </p:nvSpPr>
+        <p:spPr>
+          <a:xfrm xmlns:a="http://schemas.openxmlformats.org/drawingml/2006/main">
+            <a:off x="4286250" y="6191250"/>
+            <a:ext cx="7296150" cy="361950"/>
+          </a:xfrm>
+          <a:prstGeom xmlns:a="http://schemas.openxmlformats.org/drawingml/2006/main" prst="rect">
+            <a:avLst/>
+          </a:prstGeom>
+          <a:noFill xmlns:a="http://schemas.openxmlformats.org/drawingml/2006/main"/>
+          <a:ln xmlns:a="http://schemas.openxmlformats.org/drawingml/2006/main" w="0">
+            <a:noFill/>
+          </a:ln>
+        </p:spPr>
+        <p:txBody>
+          <a:bodyPr xmlns:a="http://schemas.openxmlformats.org/drawingml/2006/main" lIns="0" tIns="0" rIns="0" bIns="0" anchor="t">
+            <a:noAutofit/>
+          </a:bodyPr>
+          <a:lstStyle xmlns:a="http://schemas.openxmlformats.org/drawingml/2006/main"/>
+          <a:p xmlns:a="http://schemas.openxmlformats.org/drawingml/2006/main">
+            <a:pPr>
+              <a:defRPr sz="1650" b="0">
+                <a:solidFill>
+                  <a:srgbClr val="687572"/>
+                </a:solidFill>
+                <a:latin typeface="DejaVu Sans"/>
+                <a:ea typeface="DejaVu Sans"/>
+                <a:cs typeface="DejaVu Sans"/>
+              </a:defRPr>
+            </a:pPr>
+            <a:r>
+              <a:rPr sz="1650" b="0">
+                <a:solidFill>
+                  <a:srgbClr val="687572"/>
+                </a:solidFill>
+                <a:latin typeface="DejaVu Sans"/>
+                <a:ea typeface="DejaVu Sans"/>
+                <a:cs typeface="DejaVu Sans"/>
+              </a:rPr>
+              <a:t>Feedback: [Your checking routine]</a:t>
+            </a:r>
+          </a:p>
+        </p:txBody>
+      </p:sp>
     </p:spTree>
     <p:extLst>
       <p:ext uri="{BB962C8B-B14F-4D97-AF65-F5344CB8AC3E}">
-        <p14:creationId xmlns:p14="http://schemas.microsoft.com/office/powerpoint/2010/main" val="2051572634"/>
+        <p14:creationId xmlns:p14="http://schemas.microsoft.com/office/powerpoint/2010/main" val="1404761727"/>
       </p:ext>
     </p:extLst>
   </p:cSld>
